--- a/docs/reports/project-status-2026-06-27.pptx
+++ b/docs/reports/project-status-2026-06-27.pptx
@@ -2147,14 +2147,12 @@
             </a:avLst>
           </a:prstGeom>
           <a:solidFill>
-            <a:srgbClr val="FFFFFF">
-              <a:alpha val="94000"/>
-            </a:srgbClr>
+            <a:srgbClr val="065A82"/>
           </a:solidFill>
           <a:ln w="12700">
             <a:solidFill>
-              <a:srgbClr val="FFFFFF">
-                <a:alpha val="55000"/>
+              <a:srgbClr val="02C39A">
+                <a:alpha val="65000"/>
               </a:srgbClr>
             </a:solidFill>
             <a:prstDash val="solid"/>
@@ -2786,14 +2784,12 @@
             </a:avLst>
           </a:prstGeom>
           <a:solidFill>
-            <a:srgbClr val="FFFFFF">
-              <a:alpha val="93000"/>
-            </a:srgbClr>
+            <a:srgbClr val="065A82"/>
           </a:solidFill>
           <a:ln w="12700">
             <a:solidFill>
-              <a:srgbClr val="FFFFFF">
-                <a:alpha val="42000"/>
+              <a:srgbClr val="02C39A">
+                <a:alpha val="55000"/>
               </a:srgbClr>
             </a:solidFill>
             <a:prstDash val="solid"/>
@@ -2926,14 +2922,12 @@
             </a:avLst>
           </a:prstGeom>
           <a:solidFill>
-            <a:srgbClr val="FFFFFF">
-              <a:alpha val="93000"/>
-            </a:srgbClr>
+            <a:srgbClr val="065A82"/>
           </a:solidFill>
           <a:ln w="12700">
             <a:solidFill>
-              <a:srgbClr val="FFFFFF">
-                <a:alpha val="42000"/>
+              <a:srgbClr val="02C39A">
+                <a:alpha val="55000"/>
               </a:srgbClr>
             </a:solidFill>
             <a:prstDash val="solid"/>
@@ -3066,14 +3060,12 @@
             </a:avLst>
           </a:prstGeom>
           <a:solidFill>
-            <a:srgbClr val="FFFFFF">
-              <a:alpha val="93000"/>
-            </a:srgbClr>
+            <a:srgbClr val="065A82"/>
           </a:solidFill>
           <a:ln w="12700">
             <a:solidFill>
-              <a:srgbClr val="FFFFFF">
-                <a:alpha val="42000"/>
+              <a:srgbClr val="02C39A">
+                <a:alpha val="55000"/>
               </a:srgbClr>
             </a:solidFill>
             <a:prstDash val="solid"/>
@@ -3610,7 +3602,7 @@
         </p:nvSpPr>
         <p:spPr>
           <a:xfrm>
-            <a:off x="566928" y="6419088"/>
+            <a:off x="566928" y="6172200"/>
             <a:ext cx="4114800" cy="201168"/>
           </a:xfrm>
           <a:prstGeom prst="rect">
@@ -3649,7 +3641,7 @@
         </p:nvSpPr>
         <p:spPr>
           <a:xfrm>
-            <a:off x="10104120" y="6419088"/>
+            <a:off x="10104120" y="6172200"/>
             <a:ext cx="1481328" cy="201168"/>
           </a:xfrm>
           <a:prstGeom prst="rect">
@@ -4427,7 +4419,7 @@
                 <a:ea typeface="Calibri" pitchFamily="34" charset="-122"/>
                 <a:cs typeface="Calibri" pitchFamily="34" charset="-120"/>
               </a:rPr>
-              <a:t>微服务模块已拆分 common/model/client/user/app/ai/screenshot。</a:t>
+              <a:t>微服务模块拆分为 common/model/client、user/app/ai 与 screenshot。</a:t>
             </a:r>
             <a:endParaRPr lang="en-US" sz="1250" dirty="0"/>
           </a:p>
@@ -4856,7 +4848,7 @@
         </p:nvSpPr>
         <p:spPr>
           <a:xfrm>
-            <a:off x="566928" y="6419088"/>
+            <a:off x="566928" y="6172200"/>
             <a:ext cx="4114800" cy="201168"/>
           </a:xfrm>
           <a:prstGeom prst="rect">
@@ -4895,7 +4887,7 @@
         </p:nvSpPr>
         <p:spPr>
           <a:xfrm>
-            <a:off x="10104120" y="6419088"/>
+            <a:off x="10104120" y="6172200"/>
             <a:ext cx="1481328" cy="201168"/>
           </a:xfrm>
           <a:prstGeom prst="rect">
@@ -5654,18 +5646,20 @@
         </p:nvSpPr>
         <p:spPr>
           <a:xfrm>
-            <a:off x="5440680" y="2514600"/>
-            <a:ext cx="1143000" cy="1143000"/>
-          </a:xfrm>
-          <a:prstGeom prst="arc">
-            <a:avLst/>
-          </a:prstGeom>
-          <a:noFill/>
-          <a:ln w="30480">
-            <a:solidFill>
-              <a:srgbClr val="02C39A">
-                <a:alpha val="95000"/>
-              </a:srgbClr>
+            <a:off x="4160520" y="3236976"/>
+            <a:ext cx="3931920" cy="329184"/>
+          </a:xfrm>
+          <a:prstGeom prst="roundRect">
+            <a:avLst>
+              <a:gd name="adj" fmla="val 22222"/>
+            </a:avLst>
+          </a:prstGeom>
+          <a:solidFill>
+            <a:srgbClr val="E7F7F5"/>
+          </a:solidFill>
+          <a:ln w="12700">
+            <a:solidFill>
+              <a:srgbClr val="D5ECEA"/>
             </a:solidFill>
             <a:prstDash val="solid"/>
           </a:ln>
@@ -5679,8 +5673,8 @@
         </p:nvSpPr>
         <p:spPr>
           <a:xfrm>
-            <a:off x="4251960" y="2990088"/>
-            <a:ext cx="3840480" cy="201168"/>
+            <a:off x="4343400" y="3346704"/>
+            <a:ext cx="3566160" cy="100584"/>
           </a:xfrm>
           <a:prstGeom prst="rect">
             <a:avLst/>
@@ -5696,7 +5690,7 @@
               <a:buNone/>
             </a:pPr>
             <a:r>
-              <a:rPr lang="en-US" sz="1300" b="1" dirty="0">
+              <a:rPr lang="en-US" sz="1200" b="1" dirty="0">
                 <a:solidFill>
                   <a:srgbClr val="065A82"/>
                 </a:solidFill>
@@ -5706,7 +5700,7 @@
               </a:rPr>
               <a:t>需求 → 生成 → 预览 → 迭代 → 部署</a:t>
             </a:r>
-            <a:endParaRPr lang="en-US" sz="1300" dirty="0"/>
+            <a:endParaRPr lang="en-US" sz="1200" dirty="0"/>
           </a:p>
         </p:txBody>
       </p:sp>
@@ -5955,7 +5949,7 @@
         </p:nvSpPr>
         <p:spPr>
           <a:xfrm>
-            <a:off x="566928" y="6419088"/>
+            <a:off x="566928" y="6172200"/>
             <a:ext cx="4114800" cy="201168"/>
           </a:xfrm>
           <a:prstGeom prst="rect">
@@ -5994,7 +5988,7 @@
         </p:nvSpPr>
         <p:spPr>
           <a:xfrm>
-            <a:off x="10104120" y="6419088"/>
+            <a:off x="10104120" y="6172200"/>
             <a:ext cx="1481328" cy="201168"/>
           </a:xfrm>
           <a:prstGeom prst="rect">
@@ -6956,7 +6950,7 @@
         </p:nvSpPr>
         <p:spPr>
           <a:xfrm>
-            <a:off x="566928" y="6419088"/>
+            <a:off x="566928" y="6172200"/>
             <a:ext cx="4114800" cy="201168"/>
           </a:xfrm>
           <a:prstGeom prst="rect">
@@ -6995,7 +6989,7 @@
         </p:nvSpPr>
         <p:spPr>
           <a:xfrm>
-            <a:off x="10104120" y="6419088"/>
+            <a:off x="10104120" y="6172200"/>
             <a:ext cx="1481328" cy="201168"/>
           </a:xfrm>
           <a:prstGeom prst="rect">
@@ -8089,7 +8083,7 @@
         </p:nvSpPr>
         <p:spPr>
           <a:xfrm>
-            <a:off x="566928" y="6419088"/>
+            <a:off x="566928" y="6172200"/>
             <a:ext cx="4114800" cy="201168"/>
           </a:xfrm>
           <a:prstGeom prst="rect">
@@ -8128,7 +8122,7 @@
         </p:nvSpPr>
         <p:spPr>
           <a:xfrm>
-            <a:off x="10104120" y="6419088"/>
+            <a:off x="10104120" y="6172200"/>
             <a:ext cx="1481328" cy="201168"/>
           </a:xfrm>
           <a:prstGeom prst="rect">
@@ -9552,7 +9546,7 @@
         </p:nvSpPr>
         <p:spPr>
           <a:xfrm>
-            <a:off x="566928" y="6419088"/>
+            <a:off x="566928" y="6172200"/>
             <a:ext cx="4114800" cy="201168"/>
           </a:xfrm>
           <a:prstGeom prst="rect">
@@ -9591,7 +9585,7 @@
         </p:nvSpPr>
         <p:spPr>
           <a:xfrm>
-            <a:off x="10104120" y="6419088"/>
+            <a:off x="10104120" y="6172200"/>
             <a:ext cx="1481328" cy="201168"/>
           </a:xfrm>
           <a:prstGeom prst="rect">
@@ -10506,7 +10500,7 @@
         </p:nvSpPr>
         <p:spPr>
           <a:xfrm>
-            <a:off x="566928" y="6419088"/>
+            <a:off x="566928" y="6172200"/>
             <a:ext cx="4114800" cy="201168"/>
           </a:xfrm>
           <a:prstGeom prst="rect">
@@ -10545,7 +10539,7 @@
         </p:nvSpPr>
         <p:spPr>
           <a:xfrm>
-            <a:off x="10104120" y="6419088"/>
+            <a:off x="10104120" y="6172200"/>
             <a:ext cx="1481328" cy="201168"/>
           </a:xfrm>
           <a:prstGeom prst="rect">
@@ -11953,7 +11947,7 @@
         </p:nvSpPr>
         <p:spPr>
           <a:xfrm>
-            <a:off x="566928" y="6419088"/>
+            <a:off x="566928" y="6172200"/>
             <a:ext cx="4114800" cy="201168"/>
           </a:xfrm>
           <a:prstGeom prst="rect">
@@ -11992,7 +11986,7 @@
         </p:nvSpPr>
         <p:spPr>
           <a:xfrm>
-            <a:off x="10104120" y="6419088"/>
+            <a:off x="10104120" y="6172200"/>
             <a:ext cx="1481328" cy="201168"/>
           </a:xfrm>
           <a:prstGeom prst="rect">
